--- a/Predictive_Maintenance_of_Industrial_Machinery_Using_IBM_watsonx.ai_AutoAI.pptx
+++ b/Predictive_Maintenance_of_Industrial_Machinery_Using_IBM_watsonx.ai_AutoAI.pptx
@@ -14,8 +14,8 @@
     <p:sldId id="272" r:id="rId8"/>
     <p:sldId id="266" r:id="rId9"/>
     <p:sldId id="265" r:id="rId10"/>
-    <p:sldId id="267" r:id="rId11"/>
-    <p:sldId id="268" r:id="rId12"/>
+    <p:sldId id="268" r:id="rId11"/>
+    <p:sldId id="267" r:id="rId12"/>
     <p:sldId id="269" r:id="rId13"/>
     <p:sldId id="270" r:id="rId14"/>
     <p:sldId id="271" r:id="rId15"/>
@@ -3661,7 +3661,7 @@
           <p:cNvPr id="5" name="Content Placeholder 4">
             <a:extLst>
               <a:ext uri="{FF2B5EF4-FFF2-40B4-BE49-F238E27FC236}">
-                <a16:creationId xmlns:a16="http://schemas.microsoft.com/office/drawing/2014/main" id="{1CEA1E9C-B07F-204E-6132-52C37E4C198C}"/>
+                <a16:creationId xmlns:a16="http://schemas.microsoft.com/office/drawing/2014/main" id="{DFD72705-980F-F48C-D3A1-C1B7DDC0B276}"/>
               </a:ext>
             </a:extLst>
           </p:cNvPr>
@@ -3686,8 +3686,8 @@
         </p:blipFill>
         <p:spPr>
           <a:xfrm>
-            <a:off x="766916" y="668594"/>
-            <a:ext cx="10422194" cy="5351053"/>
+            <a:off x="707923" y="776748"/>
+            <a:ext cx="10962967" cy="5400215"/>
           </a:xfrm>
           <a:prstGeom prst="rect">
             <a:avLst/>
@@ -3697,7 +3697,7 @@
     </p:spTree>
     <p:extLst>
       <p:ext uri="{BB962C8B-B14F-4D97-AF65-F5344CB8AC3E}">
-        <p14:creationId xmlns:p14="http://schemas.microsoft.com/office/powerpoint/2010/main" val="188896372"/>
+        <p14:creationId xmlns:p14="http://schemas.microsoft.com/office/powerpoint/2010/main" val="1164042853"/>
       </p:ext>
     </p:extLst>
   </p:cSld>
@@ -3729,7 +3729,7 @@
           <p:cNvPr id="5" name="Content Placeholder 4">
             <a:extLst>
               <a:ext uri="{FF2B5EF4-FFF2-40B4-BE49-F238E27FC236}">
-                <a16:creationId xmlns:a16="http://schemas.microsoft.com/office/drawing/2014/main" id="{DFD72705-980F-F48C-D3A1-C1B7DDC0B276}"/>
+                <a16:creationId xmlns:a16="http://schemas.microsoft.com/office/drawing/2014/main" id="{1CEA1E9C-B07F-204E-6132-52C37E4C198C}"/>
               </a:ext>
             </a:extLst>
           </p:cNvPr>
@@ -3754,8 +3754,8 @@
         </p:blipFill>
         <p:spPr>
           <a:xfrm>
-            <a:off x="707923" y="776748"/>
-            <a:ext cx="10962967" cy="5400215"/>
+            <a:off x="766916" y="668594"/>
+            <a:ext cx="10422194" cy="5351053"/>
           </a:xfrm>
           <a:prstGeom prst="rect">
             <a:avLst/>
@@ -3765,7 +3765,7 @@
     </p:spTree>
     <p:extLst>
       <p:ext uri="{BB962C8B-B14F-4D97-AF65-F5344CB8AC3E}">
-        <p14:creationId xmlns:p14="http://schemas.microsoft.com/office/powerpoint/2010/main" val="1164042853"/>
+        <p14:creationId xmlns:p14="http://schemas.microsoft.com/office/powerpoint/2010/main" val="188896372"/>
       </p:ext>
     </p:extLst>
   </p:cSld>

--- a/Predictive_Maintenance_of_Industrial_Machinery_Using_IBM_watsonx.ai_AutoAI.pptx
+++ b/Predictive_Maintenance_of_Industrial_Machinery_Using_IBM_watsonx.ai_AutoAI.pptx
@@ -4226,7 +4226,7 @@
         </p:nvSpPr>
         <p:spPr>
           <a:xfrm>
-            <a:off x="838200" y="681037"/>
+            <a:off x="838200" y="454895"/>
             <a:ext cx="10515600" cy="1325563"/>
           </a:xfrm>
         </p:spPr>
@@ -4261,13 +4261,6 @@
                 <a:cs typeface="Arial"/>
               </a:rPr>
               <a:t> </a:t>
-            </a:r>
-            <a:r>
-              <a:rPr lang="en-IN" sz="2800" b="1" spc="-20" dirty="0">
-                <a:latin typeface="Arial"/>
-                <a:cs typeface="Arial"/>
-              </a:rPr>
-              <a:t>Link</a:t>
             </a:r>
             <a:br>
               <a:rPr lang="en-IN" dirty="0">
@@ -4297,8 +4290,8 @@
         </p:nvSpPr>
         <p:spPr>
           <a:xfrm>
-            <a:off x="583557" y="1478385"/>
-            <a:ext cx="10515600" cy="4351338"/>
+            <a:off x="534396" y="1203081"/>
+            <a:ext cx="11333140" cy="5379615"/>
           </a:xfrm>
         </p:spPr>
         <p:txBody>
@@ -4326,304 +4319,46 @@
                 <a:spcPct val="100000"/>
               </a:lnSpc>
               <a:spcBef>
-                <a:spcPts val="1375"/>
+                <a:spcPts val="725"/>
               </a:spcBef>
             </a:pPr>
             <a:r>
+              <a:rPr lang="en-IN" sz="2000" b="1" dirty="0">
+                <a:latin typeface="Arial" panose="020B0604020202020204" pitchFamily="34" charset="0"/>
+                <a:cs typeface="Arial" panose="020B0604020202020204" pitchFamily="34" charset="0"/>
+              </a:rPr>
+              <a:t>Repository Visibility</a:t>
+            </a:r>
+            <a:r>
+              <a:rPr lang="en-IN" sz="2000" b="1" dirty="0"/>
+              <a:t>:</a:t>
+            </a:r>
+            <a:r>
+              <a:rPr lang="en-IN" sz="2000" dirty="0"/>
+              <a:t> </a:t>
+            </a:r>
+            <a:r>
               <a:rPr lang="en-IN" sz="2000" dirty="0">
-                <a:solidFill>
-                  <a:srgbClr val="2B3541"/>
-                </a:solidFill>
-                <a:latin typeface="Arial" panose="020B0604020202020204" pitchFamily="34" charset="0"/>
-                <a:cs typeface="Arial" panose="020B0604020202020204" pitchFamily="34" charset="0"/>
-              </a:rPr>
-              <a:t>Please</a:t>
-            </a:r>
-            <a:r>
-              <a:rPr lang="en-IN" sz="2000" spc="80" dirty="0">
-                <a:solidFill>
-                  <a:srgbClr val="2B3541"/>
-                </a:solidFill>
-                <a:latin typeface="Arial" panose="020B0604020202020204" pitchFamily="34" charset="0"/>
-                <a:cs typeface="Arial" panose="020B0604020202020204" pitchFamily="34" charset="0"/>
-              </a:rPr>
-              <a:t> </a:t>
-            </a:r>
-            <a:r>
-              <a:rPr lang="en-IN" sz="2000" dirty="0">
-                <a:solidFill>
-                  <a:srgbClr val="2B3541"/>
-                </a:solidFill>
-                <a:latin typeface="Arial" panose="020B0604020202020204" pitchFamily="34" charset="0"/>
-                <a:cs typeface="Arial" panose="020B0604020202020204" pitchFamily="34" charset="0"/>
-              </a:rPr>
-              <a:t>create</a:t>
-            </a:r>
-            <a:r>
-              <a:rPr lang="en-IN" sz="2000" spc="5" dirty="0">
-                <a:solidFill>
-                  <a:srgbClr val="2B3541"/>
-                </a:solidFill>
-                <a:latin typeface="Arial" panose="020B0604020202020204" pitchFamily="34" charset="0"/>
-                <a:cs typeface="Arial" panose="020B0604020202020204" pitchFamily="34" charset="0"/>
-              </a:rPr>
-              <a:t> </a:t>
-            </a:r>
-            <a:r>
-              <a:rPr lang="en-IN" sz="2000" dirty="0">
-                <a:solidFill>
-                  <a:srgbClr val="2B3541"/>
-                </a:solidFill>
-                <a:latin typeface="Arial" panose="020B0604020202020204" pitchFamily="34" charset="0"/>
-                <a:cs typeface="Arial" panose="020B0604020202020204" pitchFamily="34" charset="0"/>
-              </a:rPr>
-              <a:t>public</a:t>
-            </a:r>
-            <a:r>
-              <a:rPr lang="en-IN" sz="2000" spc="40" dirty="0">
-                <a:solidFill>
-                  <a:srgbClr val="2B3541"/>
-                </a:solidFill>
-                <a:latin typeface="Arial" panose="020B0604020202020204" pitchFamily="34" charset="0"/>
-                <a:cs typeface="Arial" panose="020B0604020202020204" pitchFamily="34" charset="0"/>
-              </a:rPr>
-              <a:t> </a:t>
-            </a:r>
-            <a:r>
-              <a:rPr lang="en-IN" sz="2000" dirty="0" err="1">
-                <a:solidFill>
-                  <a:srgbClr val="2B3541"/>
-                </a:solidFill>
-                <a:latin typeface="Arial" panose="020B0604020202020204" pitchFamily="34" charset="0"/>
-                <a:cs typeface="Arial" panose="020B0604020202020204" pitchFamily="34" charset="0"/>
-              </a:rPr>
-              <a:t>github</a:t>
-            </a:r>
-            <a:r>
-              <a:rPr lang="en-IN" sz="2000" spc="85" dirty="0">
-                <a:solidFill>
-                  <a:srgbClr val="2B3541"/>
-                </a:solidFill>
-                <a:latin typeface="Arial" panose="020B0604020202020204" pitchFamily="34" charset="0"/>
-                <a:cs typeface="Arial" panose="020B0604020202020204" pitchFamily="34" charset="0"/>
-              </a:rPr>
-              <a:t> </a:t>
-            </a:r>
-            <a:r>
-              <a:rPr lang="en-IN" sz="2000" dirty="0">
-                <a:solidFill>
-                  <a:srgbClr val="2B3541"/>
-                </a:solidFill>
-                <a:latin typeface="Arial" panose="020B0604020202020204" pitchFamily="34" charset="0"/>
-                <a:cs typeface="Arial" panose="020B0604020202020204" pitchFamily="34" charset="0"/>
-              </a:rPr>
-              <a:t>repository</a:t>
-            </a:r>
-            <a:r>
-              <a:rPr lang="en-IN" sz="2000" spc="35" dirty="0">
-                <a:solidFill>
-                  <a:srgbClr val="2B3541"/>
-                </a:solidFill>
-                <a:latin typeface="Arial" panose="020B0604020202020204" pitchFamily="34" charset="0"/>
-                <a:cs typeface="Arial" panose="020B0604020202020204" pitchFamily="34" charset="0"/>
-              </a:rPr>
-              <a:t> </a:t>
-            </a:r>
-            <a:r>
-              <a:rPr lang="en-IN" sz="2000" dirty="0">
-                <a:solidFill>
-                  <a:srgbClr val="2B3541"/>
-                </a:solidFill>
-                <a:latin typeface="Arial" panose="020B0604020202020204" pitchFamily="34" charset="0"/>
-                <a:cs typeface="Arial" panose="020B0604020202020204" pitchFamily="34" charset="0"/>
-              </a:rPr>
-              <a:t>(Enable</a:t>
-            </a:r>
-            <a:r>
-              <a:rPr lang="en-IN" sz="2000" spc="80" dirty="0">
-                <a:solidFill>
-                  <a:srgbClr val="2B3541"/>
-                </a:solidFill>
-                <a:latin typeface="Arial" panose="020B0604020202020204" pitchFamily="34" charset="0"/>
-                <a:cs typeface="Arial" panose="020B0604020202020204" pitchFamily="34" charset="0"/>
-              </a:rPr>
-              <a:t> </a:t>
-            </a:r>
-            <a:r>
-              <a:rPr lang="en-IN" sz="2000" dirty="0">
-                <a:solidFill>
-                  <a:srgbClr val="2B3541"/>
-                </a:solidFill>
-                <a:latin typeface="Arial" panose="020B0604020202020204" pitchFamily="34" charset="0"/>
-                <a:cs typeface="Arial" panose="020B0604020202020204" pitchFamily="34" charset="0"/>
-              </a:rPr>
-              <a:t>Add</a:t>
-            </a:r>
-            <a:r>
-              <a:rPr lang="en-IN" sz="2000" spc="35" dirty="0">
-                <a:solidFill>
-                  <a:srgbClr val="2B3541"/>
-                </a:solidFill>
-                <a:latin typeface="Arial" panose="020B0604020202020204" pitchFamily="34" charset="0"/>
-                <a:cs typeface="Arial" panose="020B0604020202020204" pitchFamily="34" charset="0"/>
-              </a:rPr>
-              <a:t> </a:t>
-            </a:r>
-            <a:r>
-              <a:rPr lang="en-IN" sz="2000" dirty="0">
-                <a:solidFill>
-                  <a:srgbClr val="2B3541"/>
-                </a:solidFill>
-                <a:latin typeface="Arial" panose="020B0604020202020204" pitchFamily="34" charset="0"/>
-                <a:cs typeface="Arial" panose="020B0604020202020204" pitchFamily="34" charset="0"/>
-              </a:rPr>
-              <a:t>README</a:t>
-            </a:r>
-            <a:r>
-              <a:rPr lang="en-IN" sz="2000" spc="345" dirty="0">
-                <a:solidFill>
-                  <a:srgbClr val="2B3541"/>
-                </a:solidFill>
-                <a:latin typeface="Arial" panose="020B0604020202020204" pitchFamily="34" charset="0"/>
-                <a:cs typeface="Arial" panose="020B0604020202020204" pitchFamily="34" charset="0"/>
-              </a:rPr>
-              <a:t> </a:t>
-            </a:r>
-            <a:r>
-              <a:rPr lang="en-IN" sz="2000" dirty="0">
-                <a:solidFill>
-                  <a:srgbClr val="2B3541"/>
-                </a:solidFill>
-                <a:latin typeface="Arial" panose="020B0604020202020204" pitchFamily="34" charset="0"/>
-                <a:cs typeface="Arial" panose="020B0604020202020204" pitchFamily="34" charset="0"/>
-              </a:rPr>
-              <a:t>button</a:t>
-            </a:r>
-            <a:r>
-              <a:rPr lang="en-IN" sz="2000" spc="110" dirty="0">
-                <a:solidFill>
-                  <a:srgbClr val="2B3541"/>
-                </a:solidFill>
-                <a:latin typeface="Arial" panose="020B0604020202020204" pitchFamily="34" charset="0"/>
-                <a:cs typeface="Arial" panose="020B0604020202020204" pitchFamily="34" charset="0"/>
-              </a:rPr>
-              <a:t> </a:t>
-            </a:r>
-            <a:r>
-              <a:rPr lang="en-IN" sz="2000" dirty="0">
-                <a:solidFill>
-                  <a:srgbClr val="2B3541"/>
-                </a:solidFill>
-                <a:latin typeface="Arial" panose="020B0604020202020204" pitchFamily="34" charset="0"/>
-                <a:cs typeface="Arial" panose="020B0604020202020204" pitchFamily="34" charset="0"/>
-              </a:rPr>
-              <a:t>while</a:t>
-            </a:r>
-            <a:r>
-              <a:rPr lang="en-IN" sz="2000" spc="5" dirty="0">
-                <a:solidFill>
-                  <a:srgbClr val="2B3541"/>
-                </a:solidFill>
-                <a:latin typeface="Arial" panose="020B0604020202020204" pitchFamily="34" charset="0"/>
-                <a:cs typeface="Arial" panose="020B0604020202020204" pitchFamily="34" charset="0"/>
-              </a:rPr>
-              <a:t> </a:t>
-            </a:r>
-            <a:r>
-              <a:rPr lang="en-IN" sz="2000" dirty="0">
-                <a:solidFill>
-                  <a:srgbClr val="2B3541"/>
-                </a:solidFill>
-                <a:latin typeface="Arial" panose="020B0604020202020204" pitchFamily="34" charset="0"/>
-                <a:cs typeface="Arial" panose="020B0604020202020204" pitchFamily="34" charset="0"/>
-              </a:rPr>
-              <a:t>creating</a:t>
-            </a:r>
-            <a:r>
-              <a:rPr lang="en-IN" sz="2000" spc="35" dirty="0">
-                <a:solidFill>
-                  <a:srgbClr val="2B3541"/>
-                </a:solidFill>
-                <a:latin typeface="Arial" panose="020B0604020202020204" pitchFamily="34" charset="0"/>
-                <a:cs typeface="Arial" panose="020B0604020202020204" pitchFamily="34" charset="0"/>
-              </a:rPr>
-              <a:t> </a:t>
-            </a:r>
-            <a:r>
-              <a:rPr lang="en-IN" sz="2000" spc="-10" dirty="0">
-                <a:solidFill>
-                  <a:srgbClr val="2B3541"/>
-                </a:solidFill>
-                <a:latin typeface="Arial" panose="020B0604020202020204" pitchFamily="34" charset="0"/>
-                <a:cs typeface="Arial" panose="020B0604020202020204" pitchFamily="34" charset="0"/>
-              </a:rPr>
-              <a:t>repository)</a:t>
-            </a:r>
-            <a:endParaRPr lang="en-IN" sz="2000" dirty="0">
-              <a:latin typeface="Arial" panose="020B0604020202020204" pitchFamily="34" charset="0"/>
-              <a:cs typeface="Arial" panose="020B0604020202020204" pitchFamily="34" charset="0"/>
-            </a:endParaRPr>
-          </a:p>
-          <a:p>
-            <a:pPr marL="614680">
+                <a:latin typeface="Arial" panose="020B0604020202020204" pitchFamily="34" charset="0"/>
+                <a:cs typeface="Arial" panose="020B0604020202020204" pitchFamily="34" charset="0"/>
+              </a:rPr>
+              <a:t>Public</a:t>
+            </a:r>
+          </a:p>
+          <a:p>
+            <a:pPr marL="386080" indent="0">
               <a:lnSpc>
                 <a:spcPct val="100000"/>
               </a:lnSpc>
               <a:spcBef>
-                <a:spcPts val="720"/>
+                <a:spcPts val="725"/>
               </a:spcBef>
+              <a:buNone/>
             </a:pPr>
-            <a:r>
-              <a:rPr lang="en-IN" sz="2000" dirty="0">
-                <a:solidFill>
-                  <a:srgbClr val="2B3541"/>
-                </a:solidFill>
-                <a:latin typeface="Arial" panose="020B0604020202020204" pitchFamily="34" charset="0"/>
-                <a:cs typeface="Arial" panose="020B0604020202020204" pitchFamily="34" charset="0"/>
-              </a:rPr>
-              <a:t>with</a:t>
-            </a:r>
-            <a:r>
-              <a:rPr lang="en-IN" sz="2000" spc="20" dirty="0">
-                <a:solidFill>
-                  <a:srgbClr val="2B3541"/>
-                </a:solidFill>
-                <a:latin typeface="Arial" panose="020B0604020202020204" pitchFamily="34" charset="0"/>
-                <a:cs typeface="Arial" panose="020B0604020202020204" pitchFamily="34" charset="0"/>
-              </a:rPr>
-              <a:t> </a:t>
-            </a:r>
-            <a:r>
-              <a:rPr lang="en-IN" sz="2000" dirty="0">
-                <a:solidFill>
-                  <a:srgbClr val="2B3541"/>
-                </a:solidFill>
-                <a:latin typeface="Arial" panose="020B0604020202020204" pitchFamily="34" charset="0"/>
-                <a:cs typeface="Arial" panose="020B0604020202020204" pitchFamily="34" charset="0"/>
-              </a:rPr>
-              <a:t>format</a:t>
-            </a:r>
-            <a:r>
-              <a:rPr lang="en-IN" sz="2000" spc="75" dirty="0">
-                <a:solidFill>
-                  <a:srgbClr val="2B3541"/>
-                </a:solidFill>
-                <a:latin typeface="Arial" panose="020B0604020202020204" pitchFamily="34" charset="0"/>
-                <a:cs typeface="Arial" panose="020B0604020202020204" pitchFamily="34" charset="0"/>
-              </a:rPr>
-              <a:t> </a:t>
-            </a:r>
-            <a:r>
-              <a:rPr lang="en-IN" sz="2000" spc="-50" dirty="0">
-                <a:solidFill>
-                  <a:srgbClr val="2B3541"/>
-                </a:solidFill>
-                <a:latin typeface="Arial" panose="020B0604020202020204" pitchFamily="34" charset="0"/>
-                <a:cs typeface="Arial" panose="020B0604020202020204" pitchFamily="34" charset="0"/>
-              </a:rPr>
-              <a:t>–</a:t>
-            </a:r>
             <a:endParaRPr lang="en-IN" sz="2000" dirty="0">
+              <a:solidFill>
+                <a:srgbClr val="2B3541"/>
+              </a:solidFill>
               <a:latin typeface="Arial" panose="020B0604020202020204" pitchFamily="34" charset="0"/>
               <a:cs typeface="Arial" panose="020B0604020202020204" pitchFamily="34" charset="0"/>
             </a:endParaRPr>
@@ -4638,17 +4373,17 @@
               </a:spcBef>
             </a:pPr>
             <a:r>
-              <a:rPr lang="en-IN" sz="2000" dirty="0">
+              <a:rPr lang="en-IN" sz="2000" b="1" dirty="0">
                 <a:solidFill>
                   <a:srgbClr val="2B3541"/>
                 </a:solidFill>
                 <a:latin typeface="Arial" panose="020B0604020202020204" pitchFamily="34" charset="0"/>
                 <a:cs typeface="Arial" panose="020B0604020202020204" pitchFamily="34" charset="0"/>
               </a:rPr>
-              <a:t>Please</a:t>
-            </a:r>
-            <a:r>
-              <a:rPr lang="en-IN" sz="2000" spc="65" dirty="0">
+              <a:t>working</a:t>
+            </a:r>
+            <a:r>
+              <a:rPr lang="en-IN" sz="2000" b="1" spc="320" dirty="0">
                 <a:solidFill>
                   <a:srgbClr val="2B3541"/>
                 </a:solidFill>
@@ -4658,17 +4393,17 @@
               <a:t> </a:t>
             </a:r>
             <a:r>
-              <a:rPr lang="en-IN" sz="2000" dirty="0">
+              <a:rPr lang="en-IN" sz="2000" b="1" dirty="0" err="1">
                 <a:solidFill>
                   <a:srgbClr val="2B3541"/>
                 </a:solidFill>
                 <a:latin typeface="Arial" panose="020B0604020202020204" pitchFamily="34" charset="0"/>
                 <a:cs typeface="Arial" panose="020B0604020202020204" pitchFamily="34" charset="0"/>
               </a:rPr>
-              <a:t>test</a:t>
-            </a:r>
-            <a:r>
-              <a:rPr lang="en-IN" sz="2000" spc="65" dirty="0">
+              <a:t>Github</a:t>
+            </a:r>
+            <a:r>
+              <a:rPr lang="en-IN" sz="2000" b="1" spc="40" dirty="0">
                 <a:solidFill>
                   <a:srgbClr val="2B3541"/>
                 </a:solidFill>
@@ -4678,117 +4413,17 @@
               <a:t> </a:t>
             </a:r>
             <a:r>
-              <a:rPr lang="en-IN" sz="2000" dirty="0">
+              <a:rPr lang="en-IN" sz="2000" b="1" dirty="0">
                 <a:solidFill>
                   <a:srgbClr val="2B3541"/>
                 </a:solidFill>
                 <a:latin typeface="Arial" panose="020B0604020202020204" pitchFamily="34" charset="0"/>
                 <a:cs typeface="Arial" panose="020B0604020202020204" pitchFamily="34" charset="0"/>
               </a:rPr>
-              <a:t>and</a:t>
-            </a:r>
-            <a:r>
-              <a:rPr lang="en-IN" sz="2000" spc="15" dirty="0">
-                <a:solidFill>
-                  <a:srgbClr val="2B3541"/>
-                </a:solidFill>
-                <a:latin typeface="Arial" panose="020B0604020202020204" pitchFamily="34" charset="0"/>
-                <a:cs typeface="Arial" panose="020B0604020202020204" pitchFamily="34" charset="0"/>
-              </a:rPr>
-              <a:t> </a:t>
-            </a:r>
-            <a:r>
-              <a:rPr lang="en-IN" sz="2000" dirty="0">
-                <a:solidFill>
-                  <a:srgbClr val="2B3541"/>
-                </a:solidFill>
-                <a:latin typeface="Arial" panose="020B0604020202020204" pitchFamily="34" charset="0"/>
-                <a:cs typeface="Arial" panose="020B0604020202020204" pitchFamily="34" charset="0"/>
-              </a:rPr>
-              <a:t>Paste</a:t>
-            </a:r>
-            <a:r>
-              <a:rPr lang="en-IN" sz="2000" spc="65" dirty="0">
-                <a:solidFill>
-                  <a:srgbClr val="2B3541"/>
-                </a:solidFill>
-                <a:latin typeface="Arial" panose="020B0604020202020204" pitchFamily="34" charset="0"/>
-                <a:cs typeface="Arial" panose="020B0604020202020204" pitchFamily="34" charset="0"/>
-              </a:rPr>
-              <a:t> </a:t>
-            </a:r>
-            <a:r>
-              <a:rPr lang="en-IN" sz="2000" dirty="0">
-                <a:solidFill>
-                  <a:srgbClr val="2B3541"/>
-                </a:solidFill>
-                <a:latin typeface="Arial" panose="020B0604020202020204" pitchFamily="34" charset="0"/>
-                <a:cs typeface="Arial" panose="020B0604020202020204" pitchFamily="34" charset="0"/>
-              </a:rPr>
-              <a:t>the</a:t>
-            </a:r>
-            <a:r>
-              <a:rPr lang="en-IN" sz="2000" spc="-10" dirty="0">
-                <a:solidFill>
-                  <a:srgbClr val="2B3541"/>
-                </a:solidFill>
-                <a:latin typeface="Arial" panose="020B0604020202020204" pitchFamily="34" charset="0"/>
-                <a:cs typeface="Arial" panose="020B0604020202020204" pitchFamily="34" charset="0"/>
-              </a:rPr>
-              <a:t> </a:t>
-            </a:r>
-            <a:r>
-              <a:rPr lang="en-IN" sz="2000" dirty="0">
-                <a:solidFill>
-                  <a:srgbClr val="2B3541"/>
-                </a:solidFill>
-                <a:latin typeface="Arial" panose="020B0604020202020204" pitchFamily="34" charset="0"/>
-                <a:cs typeface="Arial" panose="020B0604020202020204" pitchFamily="34" charset="0"/>
-              </a:rPr>
-              <a:t>working</a:t>
-            </a:r>
-            <a:r>
-              <a:rPr lang="en-IN" sz="2000" spc="320" dirty="0">
-                <a:solidFill>
-                  <a:srgbClr val="2B3541"/>
-                </a:solidFill>
-                <a:latin typeface="Arial" panose="020B0604020202020204" pitchFamily="34" charset="0"/>
-                <a:cs typeface="Arial" panose="020B0604020202020204" pitchFamily="34" charset="0"/>
-              </a:rPr>
-              <a:t> </a:t>
-            </a:r>
-            <a:r>
-              <a:rPr lang="en-IN" sz="2000" dirty="0" err="1">
-                <a:solidFill>
-                  <a:srgbClr val="2B3541"/>
-                </a:solidFill>
-                <a:latin typeface="Arial" panose="020B0604020202020204" pitchFamily="34" charset="0"/>
-                <a:cs typeface="Arial" panose="020B0604020202020204" pitchFamily="34" charset="0"/>
-              </a:rPr>
-              <a:t>Github</a:t>
-            </a:r>
-            <a:r>
-              <a:rPr lang="en-IN" sz="2000" spc="40" dirty="0">
-                <a:solidFill>
-                  <a:srgbClr val="2B3541"/>
-                </a:solidFill>
-                <a:latin typeface="Arial" panose="020B0604020202020204" pitchFamily="34" charset="0"/>
-                <a:cs typeface="Arial" panose="020B0604020202020204" pitchFamily="34" charset="0"/>
-              </a:rPr>
-              <a:t> </a:t>
-            </a:r>
-            <a:r>
-              <a:rPr lang="en-IN" sz="2000" dirty="0">
-                <a:solidFill>
-                  <a:srgbClr val="2B3541"/>
-                </a:solidFill>
-                <a:latin typeface="Arial" panose="020B0604020202020204" pitchFamily="34" charset="0"/>
-                <a:cs typeface="Arial" panose="020B0604020202020204" pitchFamily="34" charset="0"/>
-              </a:rPr>
               <a:t>URL</a:t>
             </a:r>
             <a:r>
-              <a:rPr lang="en-IN" sz="2000" spc="50" dirty="0">
+              <a:rPr lang="en-IN" sz="2000" b="1" spc="50" dirty="0">
                 <a:solidFill>
                   <a:srgbClr val="2B3541"/>
                 </a:solidFill>
@@ -4807,521 +4442,52 @@
               </a:rPr>
               <a:t>–</a:t>
             </a:r>
-            <a:endParaRPr lang="en-IN" sz="2000" dirty="0">
-              <a:latin typeface="Arial" panose="020B0604020202020204" pitchFamily="34" charset="0"/>
-              <a:cs typeface="Arial" panose="020B0604020202020204" pitchFamily="34" charset="0"/>
-            </a:endParaRPr>
-          </a:p>
-          <a:p>
-            <a:pPr marL="614680">
+          </a:p>
+          <a:p>
+            <a:pPr marL="386080" indent="0">
               <a:lnSpc>
                 <a:spcPct val="100000"/>
               </a:lnSpc>
               <a:spcBef>
-                <a:spcPts val="720"/>
+                <a:spcPts val="725"/>
               </a:spcBef>
+              <a:buNone/>
             </a:pPr>
             <a:r>
-              <a:rPr lang="en-IN" sz="2000" b="1" dirty="0">
+              <a:rPr lang="en-IN" sz="2000" spc="-50" dirty="0">
                 <a:solidFill>
                   <a:srgbClr val="2B3541"/>
                 </a:solidFill>
                 <a:latin typeface="Arial" panose="020B0604020202020204" pitchFamily="34" charset="0"/>
                 <a:cs typeface="Arial" panose="020B0604020202020204" pitchFamily="34" charset="0"/>
               </a:rPr>
-              <a:t>Make</a:t>
-            </a:r>
-            <a:r>
-              <a:rPr lang="en-IN" sz="2000" b="1" spc="-15" dirty="0">
-                <a:solidFill>
-                  <a:srgbClr val="2B3541"/>
-                </a:solidFill>
-                <a:latin typeface="Arial" panose="020B0604020202020204" pitchFamily="34" charset="0"/>
-                <a:cs typeface="Arial" panose="020B0604020202020204" pitchFamily="34" charset="0"/>
-              </a:rPr>
-              <a:t> </a:t>
-            </a:r>
-            <a:r>
-              <a:rPr lang="en-IN" sz="2000" b="1" dirty="0">
-                <a:solidFill>
-                  <a:srgbClr val="2B3541"/>
-                </a:solidFill>
-                <a:latin typeface="Arial" panose="020B0604020202020204" pitchFamily="34" charset="0"/>
-                <a:cs typeface="Arial" panose="020B0604020202020204" pitchFamily="34" charset="0"/>
-              </a:rPr>
-              <a:t>sure</a:t>
-            </a:r>
-            <a:r>
-              <a:rPr lang="en-IN" sz="2000" b="1" spc="65" dirty="0">
-                <a:solidFill>
-                  <a:srgbClr val="2B3541"/>
-                </a:solidFill>
-                <a:latin typeface="Arial" panose="020B0604020202020204" pitchFamily="34" charset="0"/>
-                <a:cs typeface="Arial" panose="020B0604020202020204" pitchFamily="34" charset="0"/>
-              </a:rPr>
-              <a:t> </a:t>
-            </a:r>
-            <a:r>
-              <a:rPr lang="en-IN" sz="2000" b="1" dirty="0">
-                <a:solidFill>
-                  <a:srgbClr val="2B3541"/>
-                </a:solidFill>
-                <a:latin typeface="Arial" panose="020B0604020202020204" pitchFamily="34" charset="0"/>
-                <a:cs typeface="Arial" panose="020B0604020202020204" pitchFamily="34" charset="0"/>
-              </a:rPr>
-              <a:t>you</a:t>
-            </a:r>
-            <a:r>
-              <a:rPr lang="en-IN" sz="2000" b="1" spc="40" dirty="0">
-                <a:solidFill>
-                  <a:srgbClr val="2B3541"/>
-                </a:solidFill>
-                <a:latin typeface="Arial" panose="020B0604020202020204" pitchFamily="34" charset="0"/>
-                <a:cs typeface="Arial" panose="020B0604020202020204" pitchFamily="34" charset="0"/>
-              </a:rPr>
-              <a:t> </a:t>
-            </a:r>
-            <a:r>
-              <a:rPr lang="en-IN" sz="2000" b="1" dirty="0">
-                <a:solidFill>
-                  <a:srgbClr val="2B3541"/>
-                </a:solidFill>
-                <a:latin typeface="Arial" panose="020B0604020202020204" pitchFamily="34" charset="0"/>
-                <a:cs typeface="Arial" panose="020B0604020202020204" pitchFamily="34" charset="0"/>
-              </a:rPr>
-              <a:t>have</a:t>
-            </a:r>
-            <a:r>
-              <a:rPr lang="en-IN" sz="2000" b="1" spc="65" dirty="0">
-                <a:solidFill>
-                  <a:srgbClr val="2B3541"/>
-                </a:solidFill>
-                <a:latin typeface="Arial" panose="020B0604020202020204" pitchFamily="34" charset="0"/>
-                <a:cs typeface="Arial" panose="020B0604020202020204" pitchFamily="34" charset="0"/>
-              </a:rPr>
-              <a:t> </a:t>
-            </a:r>
-            <a:r>
-              <a:rPr lang="en-IN" sz="2000" b="1" dirty="0">
-                <a:solidFill>
-                  <a:srgbClr val="2B3541"/>
-                </a:solidFill>
-                <a:latin typeface="Arial" panose="020B0604020202020204" pitchFamily="34" charset="0"/>
-                <a:cs typeface="Arial" panose="020B0604020202020204" pitchFamily="34" charset="0"/>
-              </a:rPr>
-              <a:t>Uploaded</a:t>
-            </a:r>
-            <a:r>
-              <a:rPr lang="en-IN" sz="2000" b="1" spc="40" dirty="0">
-                <a:solidFill>
-                  <a:srgbClr val="2B3541"/>
-                </a:solidFill>
-                <a:latin typeface="Arial" panose="020B0604020202020204" pitchFamily="34" charset="0"/>
-                <a:cs typeface="Arial" panose="020B0604020202020204" pitchFamily="34" charset="0"/>
-              </a:rPr>
-              <a:t> </a:t>
-            </a:r>
-            <a:r>
-              <a:rPr lang="en-IN" sz="2000" b="1" dirty="0">
-                <a:solidFill>
-                  <a:srgbClr val="2B3541"/>
-                </a:solidFill>
-                <a:latin typeface="Arial" panose="020B0604020202020204" pitchFamily="34" charset="0"/>
-                <a:cs typeface="Arial" panose="020B0604020202020204" pitchFamily="34" charset="0"/>
-              </a:rPr>
-              <a:t>following</a:t>
-            </a:r>
-            <a:r>
-              <a:rPr lang="en-IN" sz="2000" b="1" spc="15" dirty="0">
-                <a:solidFill>
-                  <a:srgbClr val="2B3541"/>
-                </a:solidFill>
-                <a:latin typeface="Arial" panose="020B0604020202020204" pitchFamily="34" charset="0"/>
-                <a:cs typeface="Arial" panose="020B0604020202020204" pitchFamily="34" charset="0"/>
-              </a:rPr>
-              <a:t> </a:t>
-            </a:r>
-            <a:r>
-              <a:rPr lang="en-IN" sz="2000" b="1" dirty="0">
-                <a:solidFill>
-                  <a:srgbClr val="2B3541"/>
-                </a:solidFill>
-                <a:latin typeface="Arial" panose="020B0604020202020204" pitchFamily="34" charset="0"/>
-                <a:cs typeface="Arial" panose="020B0604020202020204" pitchFamily="34" charset="0"/>
-              </a:rPr>
-              <a:t>three</a:t>
-            </a:r>
-            <a:r>
-              <a:rPr lang="en-IN" sz="2000" b="1" spc="65" dirty="0">
-                <a:solidFill>
-                  <a:srgbClr val="2B3541"/>
-                </a:solidFill>
-                <a:latin typeface="Arial" panose="020B0604020202020204" pitchFamily="34" charset="0"/>
-                <a:cs typeface="Arial" panose="020B0604020202020204" pitchFamily="34" charset="0"/>
-              </a:rPr>
-              <a:t> </a:t>
-            </a:r>
-            <a:r>
-              <a:rPr lang="en-IN" sz="2000" b="1" dirty="0">
-                <a:solidFill>
-                  <a:srgbClr val="2B3541"/>
-                </a:solidFill>
-                <a:latin typeface="Arial" panose="020B0604020202020204" pitchFamily="34" charset="0"/>
-                <a:cs typeface="Arial" panose="020B0604020202020204" pitchFamily="34" charset="0"/>
-              </a:rPr>
-              <a:t>files</a:t>
-            </a:r>
-            <a:r>
-              <a:rPr lang="en-IN" sz="2000" b="1" spc="40" dirty="0">
-                <a:solidFill>
-                  <a:srgbClr val="2B3541"/>
-                </a:solidFill>
-                <a:latin typeface="Arial" panose="020B0604020202020204" pitchFamily="34" charset="0"/>
-                <a:cs typeface="Arial" panose="020B0604020202020204" pitchFamily="34" charset="0"/>
-              </a:rPr>
-              <a:t> </a:t>
-            </a:r>
-            <a:r>
-              <a:rPr lang="en-IN" sz="2000" b="1" dirty="0">
-                <a:solidFill>
-                  <a:srgbClr val="2B3541"/>
-                </a:solidFill>
-                <a:latin typeface="Arial" panose="020B0604020202020204" pitchFamily="34" charset="0"/>
-                <a:cs typeface="Arial" panose="020B0604020202020204" pitchFamily="34" charset="0"/>
-              </a:rPr>
-              <a:t>into</a:t>
-            </a:r>
-            <a:r>
-              <a:rPr lang="en-IN" sz="2000" b="1" spc="15" dirty="0">
-                <a:solidFill>
-                  <a:srgbClr val="2B3541"/>
-                </a:solidFill>
-                <a:latin typeface="Arial" panose="020B0604020202020204" pitchFamily="34" charset="0"/>
-                <a:cs typeface="Arial" panose="020B0604020202020204" pitchFamily="34" charset="0"/>
-              </a:rPr>
-              <a:t> </a:t>
-            </a:r>
-            <a:r>
-              <a:rPr lang="en-IN" sz="2000" b="1" dirty="0">
-                <a:solidFill>
-                  <a:srgbClr val="2B3541"/>
-                </a:solidFill>
-                <a:latin typeface="Arial" panose="020B0604020202020204" pitchFamily="34" charset="0"/>
-                <a:cs typeface="Arial" panose="020B0604020202020204" pitchFamily="34" charset="0"/>
-              </a:rPr>
-              <a:t>your</a:t>
-            </a:r>
-            <a:r>
-              <a:rPr lang="en-IN" sz="2000" b="1" spc="100" dirty="0">
-                <a:solidFill>
-                  <a:srgbClr val="2B3541"/>
-                </a:solidFill>
-                <a:latin typeface="Arial" panose="020B0604020202020204" pitchFamily="34" charset="0"/>
-                <a:cs typeface="Arial" panose="020B0604020202020204" pitchFamily="34" charset="0"/>
-              </a:rPr>
-              <a:t> </a:t>
-            </a:r>
-            <a:r>
-              <a:rPr lang="en-IN" sz="2000" b="1" dirty="0" err="1">
-                <a:solidFill>
-                  <a:srgbClr val="2B3541"/>
-                </a:solidFill>
-                <a:latin typeface="Arial" panose="020B0604020202020204" pitchFamily="34" charset="0"/>
-                <a:cs typeface="Arial" panose="020B0604020202020204" pitchFamily="34" charset="0"/>
-              </a:rPr>
-              <a:t>github</a:t>
-            </a:r>
-            <a:r>
-              <a:rPr lang="en-IN" sz="2000" b="1" spc="65" dirty="0">
-                <a:solidFill>
-                  <a:srgbClr val="2B3541"/>
-                </a:solidFill>
-                <a:latin typeface="Arial" panose="020B0604020202020204" pitchFamily="34" charset="0"/>
-                <a:cs typeface="Arial" panose="020B0604020202020204" pitchFamily="34" charset="0"/>
-              </a:rPr>
-              <a:t> </a:t>
-            </a:r>
-            <a:r>
-              <a:rPr lang="en-IN" sz="2000" b="1" spc="-10" dirty="0">
-                <a:solidFill>
-                  <a:srgbClr val="2B3541"/>
-                </a:solidFill>
-                <a:latin typeface="Arial" panose="020B0604020202020204" pitchFamily="34" charset="0"/>
-                <a:cs typeface="Arial" panose="020B0604020202020204" pitchFamily="34" charset="0"/>
-              </a:rPr>
-              <a:t>repository</a:t>
-            </a:r>
-            <a:endParaRPr lang="en-IN" sz="2000" dirty="0">
-              <a:latin typeface="Arial" panose="020B0604020202020204" pitchFamily="34" charset="0"/>
-              <a:cs typeface="Arial" panose="020B0604020202020204" pitchFamily="34" charset="0"/>
-            </a:endParaRPr>
-          </a:p>
-          <a:p>
-            <a:pPr marL="614680">
+              <a:t>       </a:t>
+            </a:r>
+            <a:r>
+              <a:rPr lang="en-IN" sz="2000" u="sng" dirty="0">
+                <a:hlinkClick r:id="rId2"/>
+              </a:rPr>
+              <a:t>https://github.com/Nikitha2802/Predictive-Maintenance-of-Industrial-Machinery</a:t>
+            </a:r>
+            <a:endParaRPr lang="en-IN" sz="2000" u="sng" dirty="0"/>
+          </a:p>
+          <a:p>
+            <a:pPr marL="386080" indent="0">
               <a:lnSpc>
                 <a:spcPct val="100000"/>
               </a:lnSpc>
               <a:spcBef>
-                <a:spcPts val="720"/>
+                <a:spcPts val="725"/>
               </a:spcBef>
+              <a:buNone/>
             </a:pPr>
-            <a:r>
-              <a:rPr lang="en-IN" sz="2000" dirty="0">
-                <a:solidFill>
-                  <a:srgbClr val="2B3541"/>
-                </a:solidFill>
-                <a:latin typeface="Arial" panose="020B0604020202020204" pitchFamily="34" charset="0"/>
-                <a:cs typeface="Arial" panose="020B0604020202020204" pitchFamily="34" charset="0"/>
-              </a:rPr>
-              <a:t>1)</a:t>
-            </a:r>
-            <a:r>
-              <a:rPr lang="en-IN" sz="2000" spc="15" dirty="0">
-                <a:solidFill>
-                  <a:srgbClr val="2B3541"/>
-                </a:solidFill>
-                <a:latin typeface="Arial" panose="020B0604020202020204" pitchFamily="34" charset="0"/>
-                <a:cs typeface="Arial" panose="020B0604020202020204" pitchFamily="34" charset="0"/>
-              </a:rPr>
-              <a:t> </a:t>
-            </a:r>
-            <a:r>
-              <a:rPr lang="en-IN" sz="2000" dirty="0">
-                <a:solidFill>
-                  <a:srgbClr val="2B3541"/>
-                </a:solidFill>
-                <a:latin typeface="Arial" panose="020B0604020202020204" pitchFamily="34" charset="0"/>
-                <a:cs typeface="Arial" panose="020B0604020202020204" pitchFamily="34" charset="0"/>
-              </a:rPr>
-              <a:t>Data.csv</a:t>
-            </a:r>
-            <a:r>
-              <a:rPr lang="en-IN" sz="2000" spc="65" dirty="0">
-                <a:solidFill>
-                  <a:srgbClr val="2B3541"/>
-                </a:solidFill>
-                <a:latin typeface="Arial" panose="020B0604020202020204" pitchFamily="34" charset="0"/>
-                <a:cs typeface="Arial" panose="020B0604020202020204" pitchFamily="34" charset="0"/>
-              </a:rPr>
-              <a:t> </a:t>
-            </a:r>
-            <a:r>
-              <a:rPr lang="en-IN" sz="2000" dirty="0">
-                <a:solidFill>
-                  <a:srgbClr val="2B3541"/>
-                </a:solidFill>
-                <a:latin typeface="Arial" panose="020B0604020202020204" pitchFamily="34" charset="0"/>
-                <a:cs typeface="Arial" panose="020B0604020202020204" pitchFamily="34" charset="0"/>
-              </a:rPr>
-              <a:t>file,</a:t>
-            </a:r>
-            <a:r>
-              <a:rPr lang="en-IN" sz="2000" spc="105" dirty="0">
-                <a:solidFill>
-                  <a:srgbClr val="2B3541"/>
-                </a:solidFill>
-                <a:latin typeface="Arial" panose="020B0604020202020204" pitchFamily="34" charset="0"/>
-                <a:cs typeface="Arial" panose="020B0604020202020204" pitchFamily="34" charset="0"/>
-              </a:rPr>
-              <a:t> </a:t>
-            </a:r>
-            <a:r>
-              <a:rPr lang="en-IN" sz="2000" dirty="0">
-                <a:solidFill>
-                  <a:srgbClr val="2B3541"/>
-                </a:solidFill>
-                <a:latin typeface="Arial" panose="020B0604020202020204" pitchFamily="34" charset="0"/>
-                <a:cs typeface="Arial" panose="020B0604020202020204" pitchFamily="34" charset="0"/>
-              </a:rPr>
-              <a:t>2)</a:t>
-            </a:r>
-            <a:r>
-              <a:rPr lang="en-IN" sz="2000" spc="25" dirty="0">
-                <a:solidFill>
-                  <a:srgbClr val="2B3541"/>
-                </a:solidFill>
-                <a:latin typeface="Arial" panose="020B0604020202020204" pitchFamily="34" charset="0"/>
-                <a:cs typeface="Arial" panose="020B0604020202020204" pitchFamily="34" charset="0"/>
-              </a:rPr>
-              <a:t> </a:t>
-            </a:r>
-            <a:r>
-              <a:rPr lang="en-IN" sz="2000" dirty="0">
-                <a:solidFill>
-                  <a:srgbClr val="2B3541"/>
-                </a:solidFill>
-                <a:latin typeface="Arial" panose="020B0604020202020204" pitchFamily="34" charset="0"/>
-                <a:cs typeface="Arial" panose="020B0604020202020204" pitchFamily="34" charset="0"/>
-              </a:rPr>
-              <a:t>yourproblemstatement.pdf</a:t>
-            </a:r>
-            <a:r>
-              <a:rPr lang="en-IN" sz="2000" spc="105" dirty="0">
-                <a:solidFill>
-                  <a:srgbClr val="2B3541"/>
-                </a:solidFill>
-                <a:latin typeface="Arial" panose="020B0604020202020204" pitchFamily="34" charset="0"/>
-                <a:cs typeface="Arial" panose="020B0604020202020204" pitchFamily="34" charset="0"/>
-              </a:rPr>
-              <a:t> </a:t>
-            </a:r>
-            <a:r>
-              <a:rPr lang="en-IN" sz="2000" dirty="0">
-                <a:solidFill>
-                  <a:srgbClr val="2B3541"/>
-                </a:solidFill>
-                <a:latin typeface="Arial" panose="020B0604020202020204" pitchFamily="34" charset="0"/>
-                <a:cs typeface="Arial" panose="020B0604020202020204" pitchFamily="34" charset="0"/>
-              </a:rPr>
-              <a:t>file</a:t>
-            </a:r>
-            <a:r>
-              <a:rPr lang="en-IN" sz="2000" spc="340" dirty="0">
-                <a:solidFill>
-                  <a:srgbClr val="2B3541"/>
-                </a:solidFill>
-                <a:latin typeface="Arial" panose="020B0604020202020204" pitchFamily="34" charset="0"/>
-                <a:cs typeface="Arial" panose="020B0604020202020204" pitchFamily="34" charset="0"/>
-              </a:rPr>
-              <a:t> </a:t>
-            </a:r>
-            <a:r>
-              <a:rPr lang="en-IN" sz="2000" dirty="0">
-                <a:solidFill>
-                  <a:srgbClr val="2B3541"/>
-                </a:solidFill>
-                <a:latin typeface="Arial" panose="020B0604020202020204" pitchFamily="34" charset="0"/>
-                <a:cs typeface="Arial" panose="020B0604020202020204" pitchFamily="34" charset="0"/>
-              </a:rPr>
-              <a:t>3)</a:t>
-            </a:r>
-            <a:r>
-              <a:rPr lang="en-IN" sz="2000" spc="25" dirty="0">
-                <a:solidFill>
-                  <a:srgbClr val="2B3541"/>
-                </a:solidFill>
-                <a:latin typeface="Arial" panose="020B0604020202020204" pitchFamily="34" charset="0"/>
-                <a:cs typeface="Arial" panose="020B0604020202020204" pitchFamily="34" charset="0"/>
-              </a:rPr>
-              <a:t> </a:t>
-            </a:r>
-            <a:r>
-              <a:rPr lang="en-IN" sz="2000" dirty="0">
-                <a:solidFill>
-                  <a:srgbClr val="2B3541"/>
-                </a:solidFill>
-                <a:latin typeface="Arial" panose="020B0604020202020204" pitchFamily="34" charset="0"/>
-                <a:cs typeface="Arial" panose="020B0604020202020204" pitchFamily="34" charset="0"/>
-              </a:rPr>
-              <a:t>your</a:t>
-            </a:r>
-            <a:r>
-              <a:rPr lang="en-IN" sz="2000" spc="20" dirty="0">
-                <a:solidFill>
-                  <a:srgbClr val="2B3541"/>
-                </a:solidFill>
-                <a:latin typeface="Arial" panose="020B0604020202020204" pitchFamily="34" charset="0"/>
-                <a:cs typeface="Arial" panose="020B0604020202020204" pitchFamily="34" charset="0"/>
-              </a:rPr>
-              <a:t> </a:t>
-            </a:r>
-            <a:r>
-              <a:rPr lang="en-IN" sz="2000" dirty="0">
-                <a:solidFill>
-                  <a:srgbClr val="2B3541"/>
-                </a:solidFill>
-                <a:latin typeface="Arial" panose="020B0604020202020204" pitchFamily="34" charset="0"/>
-                <a:cs typeface="Arial" panose="020B0604020202020204" pitchFamily="34" charset="0"/>
-              </a:rPr>
-              <a:t>project</a:t>
-            </a:r>
-            <a:r>
-              <a:rPr lang="en-IN" sz="2000" spc="-5" dirty="0">
-                <a:solidFill>
-                  <a:srgbClr val="2B3541"/>
-                </a:solidFill>
-                <a:latin typeface="Arial" panose="020B0604020202020204" pitchFamily="34" charset="0"/>
-                <a:cs typeface="Arial" panose="020B0604020202020204" pitchFamily="34" charset="0"/>
-              </a:rPr>
-              <a:t> </a:t>
-            </a:r>
-            <a:r>
-              <a:rPr lang="en-IN" sz="2000" dirty="0">
-                <a:solidFill>
-                  <a:srgbClr val="2B3541"/>
-                </a:solidFill>
-                <a:latin typeface="Arial" panose="020B0604020202020204" pitchFamily="34" charset="0"/>
-                <a:cs typeface="Arial" panose="020B0604020202020204" pitchFamily="34" charset="0"/>
-              </a:rPr>
-              <a:t>presntation.pptx</a:t>
-            </a:r>
-            <a:r>
-              <a:rPr lang="en-IN" sz="2000" spc="30" dirty="0">
-                <a:solidFill>
-                  <a:srgbClr val="2B3541"/>
-                </a:solidFill>
-                <a:latin typeface="Arial" panose="020B0604020202020204" pitchFamily="34" charset="0"/>
-                <a:cs typeface="Arial" panose="020B0604020202020204" pitchFamily="34" charset="0"/>
-              </a:rPr>
-              <a:t> </a:t>
-            </a:r>
-            <a:r>
-              <a:rPr lang="en-IN" sz="2000" dirty="0">
-                <a:solidFill>
-                  <a:srgbClr val="2B3541"/>
-                </a:solidFill>
-                <a:latin typeface="Arial" panose="020B0604020202020204" pitchFamily="34" charset="0"/>
-                <a:cs typeface="Arial" panose="020B0604020202020204" pitchFamily="34" charset="0"/>
-              </a:rPr>
-              <a:t>file</a:t>
-            </a:r>
-            <a:r>
-              <a:rPr lang="en-IN" sz="2000" spc="80" dirty="0">
-                <a:solidFill>
-                  <a:srgbClr val="2B3541"/>
-                </a:solidFill>
-                <a:latin typeface="Arial" panose="020B0604020202020204" pitchFamily="34" charset="0"/>
-                <a:cs typeface="Arial" panose="020B0604020202020204" pitchFamily="34" charset="0"/>
-              </a:rPr>
-              <a:t> </a:t>
-            </a:r>
-            <a:r>
-              <a:rPr lang="en-IN" sz="2000" dirty="0">
-                <a:solidFill>
-                  <a:srgbClr val="2B3541"/>
-                </a:solidFill>
-                <a:latin typeface="Arial" panose="020B0604020202020204" pitchFamily="34" charset="0"/>
-                <a:cs typeface="Arial" panose="020B0604020202020204" pitchFamily="34" charset="0"/>
-              </a:rPr>
-              <a:t>4)</a:t>
-            </a:r>
-            <a:r>
-              <a:rPr lang="en-IN" sz="2000" spc="25" dirty="0">
-                <a:solidFill>
-                  <a:srgbClr val="2B3541"/>
-                </a:solidFill>
-                <a:latin typeface="Arial" panose="020B0604020202020204" pitchFamily="34" charset="0"/>
-                <a:cs typeface="Arial" panose="020B0604020202020204" pitchFamily="34" charset="0"/>
-              </a:rPr>
-              <a:t> </a:t>
-            </a:r>
-            <a:r>
-              <a:rPr lang="en-IN" sz="2000" spc="-10" dirty="0">
-                <a:solidFill>
-                  <a:srgbClr val="2B3541"/>
-                </a:solidFill>
-                <a:latin typeface="Arial" panose="020B0604020202020204" pitchFamily="34" charset="0"/>
-                <a:cs typeface="Arial" panose="020B0604020202020204" pitchFamily="34" charset="0"/>
-              </a:rPr>
-              <a:t>Python</a:t>
-            </a:r>
-            <a:endParaRPr lang="en-IN" sz="2000" dirty="0">
+            <a:endParaRPr lang="en-IN" sz="2000" u="sng" dirty="0">
               <a:latin typeface="Arial" panose="020B0604020202020204" pitchFamily="34" charset="0"/>
               <a:cs typeface="Arial" panose="020B0604020202020204" pitchFamily="34" charset="0"/>
             </a:endParaRPr>
           </a:p>
           <a:p>
-            <a:pPr marL="614680">
+            <a:pPr marL="728980" indent="-342900">
               <a:lnSpc>
                 <a:spcPct val="100000"/>
               </a:lnSpc>
@@ -5330,104 +4496,101 @@
               </a:spcBef>
             </a:pPr>
             <a:r>
-              <a:rPr lang="en-IN" sz="2000" spc="-37" baseline="18518" dirty="0">
-                <a:solidFill>
-                  <a:srgbClr val="2B3541"/>
-                </a:solidFill>
-                <a:latin typeface="Arial" panose="020B0604020202020204" pitchFamily="34" charset="0"/>
-                <a:cs typeface="Arial" panose="020B0604020202020204" pitchFamily="34" charset="0"/>
-              </a:rPr>
-              <a:t>·</a:t>
-            </a:r>
-            <a:r>
-              <a:rPr lang="en-IN" sz="2000" spc="-25" dirty="0">
-                <a:solidFill>
-                  <a:srgbClr val="2B3541"/>
-                </a:solidFill>
-                <a:latin typeface="Arial" panose="020B0604020202020204" pitchFamily="34" charset="0"/>
-                <a:cs typeface="Arial" panose="020B0604020202020204" pitchFamily="34" charset="0"/>
-              </a:rPr>
-              <a:t>Notebook</a:t>
-            </a:r>
-            <a:r>
-              <a:rPr lang="en-IN" sz="2000" spc="55" dirty="0">
-                <a:solidFill>
-                  <a:srgbClr val="2B3541"/>
-                </a:solidFill>
-                <a:latin typeface="Arial" panose="020B0604020202020204" pitchFamily="34" charset="0"/>
-                <a:cs typeface="Arial" panose="020B0604020202020204" pitchFamily="34" charset="0"/>
-              </a:rPr>
-              <a:t> </a:t>
+              <a:rPr lang="en-IN" sz="2000" b="1" dirty="0">
+                <a:latin typeface="Arial" panose="020B0604020202020204" pitchFamily="34" charset="0"/>
+                <a:cs typeface="Arial" panose="020B0604020202020204" pitchFamily="34" charset="0"/>
+              </a:rPr>
+              <a:t>Repository Contents:</a:t>
+            </a:r>
+          </a:p>
+          <a:p>
+            <a:pPr marL="843280" indent="-457200">
+              <a:lnSpc>
+                <a:spcPct val="100000"/>
+              </a:lnSpc>
+              <a:spcBef>
+                <a:spcPts val="725"/>
+              </a:spcBef>
+              <a:buFont typeface="+mj-lt"/>
+              <a:buAutoNum type="arabicPeriod"/>
+            </a:pPr>
+            <a:r>
+              <a:rPr lang="en-IN" sz="2000" b="1" dirty="0">
+                <a:latin typeface="Arial" panose="020B0604020202020204" pitchFamily="34" charset="0"/>
+                <a:cs typeface="Arial" panose="020B0604020202020204" pitchFamily="34" charset="0"/>
+              </a:rPr>
+              <a:t>  </a:t>
             </a:r>
             <a:r>
               <a:rPr lang="en-IN" sz="2000" dirty="0">
-                <a:solidFill>
-                  <a:srgbClr val="2B3541"/>
-                </a:solidFill>
-                <a:latin typeface="Arial" panose="020B0604020202020204" pitchFamily="34" charset="0"/>
-                <a:cs typeface="Arial" panose="020B0604020202020204" pitchFamily="34" charset="0"/>
-              </a:rPr>
-              <a:t>downloaded</a:t>
-            </a:r>
-            <a:r>
-              <a:rPr lang="en-IN" sz="2000" spc="60" dirty="0">
-                <a:solidFill>
-                  <a:srgbClr val="2B3541"/>
-                </a:solidFill>
-                <a:latin typeface="Arial" panose="020B0604020202020204" pitchFamily="34" charset="0"/>
-                <a:cs typeface="Arial" panose="020B0604020202020204" pitchFamily="34" charset="0"/>
-              </a:rPr>
-              <a:t> </a:t>
-            </a:r>
+                <a:latin typeface="Arial" panose="020B0604020202020204" pitchFamily="34" charset="0"/>
+                <a:cs typeface="Arial" panose="020B0604020202020204" pitchFamily="34" charset="0"/>
+              </a:rPr>
+              <a:t>predictive_maintenance.csv </a:t>
+            </a:r>
+          </a:p>
+          <a:p>
+            <a:pPr marL="843280" indent="-457200">
+              <a:lnSpc>
+                <a:spcPct val="100000"/>
+              </a:lnSpc>
+              <a:spcBef>
+                <a:spcPts val="725"/>
+              </a:spcBef>
+              <a:buFont typeface="+mj-lt"/>
+              <a:buAutoNum type="arabicPeriod"/>
+            </a:pPr>
             <a:r>
               <a:rPr lang="en-IN" sz="2000" dirty="0">
-                <a:solidFill>
-                  <a:srgbClr val="2B3541"/>
-                </a:solidFill>
-                <a:latin typeface="Arial" panose="020B0604020202020204" pitchFamily="34" charset="0"/>
-                <a:cs typeface="Arial" panose="020B0604020202020204" pitchFamily="34" charset="0"/>
-              </a:rPr>
-              <a:t>from</a:t>
-            </a:r>
-            <a:r>
-              <a:rPr lang="en-IN" sz="2000" spc="25" dirty="0">
-                <a:solidFill>
-                  <a:srgbClr val="2B3541"/>
-                </a:solidFill>
-                <a:latin typeface="Arial" panose="020B0604020202020204" pitchFamily="34" charset="0"/>
-                <a:cs typeface="Arial" panose="020B0604020202020204" pitchFamily="34" charset="0"/>
-              </a:rPr>
-              <a:t> </a:t>
-            </a:r>
+                <a:latin typeface="Arial" panose="020B0604020202020204" pitchFamily="34" charset="0"/>
+                <a:cs typeface="Arial" panose="020B0604020202020204" pitchFamily="34" charset="0"/>
+              </a:rPr>
+              <a:t>  Problem_Statement.pdf</a:t>
+            </a:r>
+          </a:p>
+          <a:p>
+            <a:pPr marL="843280" indent="-457200">
+              <a:lnSpc>
+                <a:spcPct val="100000"/>
+              </a:lnSpc>
+              <a:spcBef>
+                <a:spcPts val="725"/>
+              </a:spcBef>
+              <a:buFont typeface="+mj-lt"/>
+              <a:buAutoNum type="arabicPeriod"/>
+            </a:pPr>
             <a:r>
               <a:rPr lang="en-IN" sz="2000" dirty="0">
-                <a:solidFill>
-                  <a:srgbClr val="2B3541"/>
-                </a:solidFill>
-                <a:latin typeface="Arial" panose="020B0604020202020204" pitchFamily="34" charset="0"/>
-                <a:cs typeface="Arial" panose="020B0604020202020204" pitchFamily="34" charset="0"/>
-              </a:rPr>
-              <a:t>IBM</a:t>
-            </a:r>
-            <a:r>
-              <a:rPr lang="en-IN" sz="2000" spc="85" dirty="0">
-                <a:solidFill>
-                  <a:srgbClr val="2B3541"/>
-                </a:solidFill>
-                <a:latin typeface="Arial" panose="020B0604020202020204" pitchFamily="34" charset="0"/>
-                <a:cs typeface="Arial" panose="020B0604020202020204" pitchFamily="34" charset="0"/>
-              </a:rPr>
-              <a:t> </a:t>
-            </a:r>
-            <a:r>
-              <a:rPr lang="en-IN" sz="2000" spc="-20" dirty="0">
-                <a:solidFill>
-                  <a:srgbClr val="2B3541"/>
-                </a:solidFill>
-                <a:latin typeface="Arial" panose="020B0604020202020204" pitchFamily="34" charset="0"/>
-                <a:cs typeface="Arial" panose="020B0604020202020204" pitchFamily="34" charset="0"/>
-              </a:rPr>
-              <a:t>Cloud</a:t>
+                <a:latin typeface="Arial" panose="020B0604020202020204" pitchFamily="34" charset="0"/>
+                <a:cs typeface="Arial" panose="020B0604020202020204" pitchFamily="34" charset="0"/>
+              </a:rPr>
+              <a:t>  Predictive_Maintenance_of_Industrial_Machinery_Using_IBM_watsonx.ai_AutoAI.pptx </a:t>
+            </a:r>
+          </a:p>
+          <a:p>
+            <a:pPr marL="843280" indent="-457200">
+              <a:lnSpc>
+                <a:spcPct val="100000"/>
+              </a:lnSpc>
+              <a:spcBef>
+                <a:spcPts val="725"/>
+              </a:spcBef>
+              <a:buFont typeface="+mj-lt"/>
+              <a:buAutoNum type="arabicPeriod"/>
+            </a:pPr>
+            <a:r>
+              <a:rPr lang="en-IN" sz="2000" dirty="0">
+                <a:latin typeface="Arial" panose="020B0604020202020204" pitchFamily="34" charset="0"/>
+                <a:cs typeface="Arial" panose="020B0604020202020204" pitchFamily="34" charset="0"/>
+              </a:rPr>
+              <a:t>  </a:t>
+            </a:r>
+            <a:r>
+              <a:rPr lang="en-IN" sz="2000" dirty="0" err="1">
+                <a:latin typeface="Arial" panose="020B0604020202020204" pitchFamily="34" charset="0"/>
+                <a:cs typeface="Arial" panose="020B0604020202020204" pitchFamily="34" charset="0"/>
+              </a:rPr>
+              <a:t>Predictive_Maintenance_AutoAI.ipynb</a:t>
             </a:r>
             <a:endParaRPr lang="en-IN" sz="2000" dirty="0">
               <a:latin typeface="Arial" panose="020B0604020202020204" pitchFamily="34" charset="0"/>
@@ -5435,92 +4598,15 @@
             </a:endParaRPr>
           </a:p>
           <a:p>
-            <a:pPr>
-              <a:lnSpc>
-                <a:spcPct val="100000"/>
-              </a:lnSpc>
-            </a:pPr>
-            <a:endParaRPr lang="en-IN" sz="2000" dirty="0">
-              <a:latin typeface="Arial" panose="020B0604020202020204" pitchFamily="34" charset="0"/>
-              <a:cs typeface="Arial" panose="020B0604020202020204" pitchFamily="34" charset="0"/>
-            </a:endParaRPr>
-          </a:p>
-          <a:p>
-            <a:pPr>
+            <a:pPr marL="386080" indent="0">
               <a:lnSpc>
                 <a:spcPct val="100000"/>
               </a:lnSpc>
               <a:spcBef>
-                <a:spcPts val="615"/>
+                <a:spcPts val="725"/>
               </a:spcBef>
+              <a:buNone/>
             </a:pPr>
-            <a:endParaRPr lang="en-IN" sz="2000" dirty="0">
-              <a:latin typeface="Arial" panose="020B0604020202020204" pitchFamily="34" charset="0"/>
-              <a:cs typeface="Arial" panose="020B0604020202020204" pitchFamily="34" charset="0"/>
-            </a:endParaRPr>
-          </a:p>
-          <a:p>
-            <a:pPr marL="614680">
-              <a:lnSpc>
-                <a:spcPct val="100000"/>
-              </a:lnSpc>
-            </a:pPr>
-            <a:r>
-              <a:rPr lang="en-IN" sz="2000" spc="-50" dirty="0">
-                <a:solidFill>
-                  <a:srgbClr val="2B3541"/>
-                </a:solidFill>
-                <a:latin typeface="Arial" panose="020B0604020202020204" pitchFamily="34" charset="0"/>
-                <a:cs typeface="Arial" panose="020B0604020202020204" pitchFamily="34" charset="0"/>
-              </a:rPr>
-              <a:t>·</a:t>
-            </a:r>
-            <a:endParaRPr lang="en-IN" sz="2000" dirty="0">
-              <a:latin typeface="Arial" panose="020B0604020202020204" pitchFamily="34" charset="0"/>
-              <a:cs typeface="Arial" panose="020B0604020202020204" pitchFamily="34" charset="0"/>
-            </a:endParaRPr>
-          </a:p>
-          <a:p>
-            <a:pPr>
-              <a:lnSpc>
-                <a:spcPct val="100000"/>
-              </a:lnSpc>
-            </a:pPr>
-            <a:endParaRPr lang="en-IN" sz="2000" dirty="0">
-              <a:latin typeface="Arial" panose="020B0604020202020204" pitchFamily="34" charset="0"/>
-              <a:cs typeface="Arial" panose="020B0604020202020204" pitchFamily="34" charset="0"/>
-            </a:endParaRPr>
-          </a:p>
-          <a:p>
-            <a:pPr>
-              <a:lnSpc>
-                <a:spcPct val="100000"/>
-              </a:lnSpc>
-              <a:spcBef>
-                <a:spcPts val="930"/>
-              </a:spcBef>
-            </a:pPr>
-            <a:endParaRPr lang="en-IN" sz="2000" dirty="0">
-              <a:latin typeface="Arial" panose="020B0604020202020204" pitchFamily="34" charset="0"/>
-              <a:cs typeface="Arial" panose="020B0604020202020204" pitchFamily="34" charset="0"/>
-            </a:endParaRPr>
-          </a:p>
-          <a:p>
-            <a:pPr marL="614680">
-              <a:lnSpc>
-                <a:spcPct val="100000"/>
-              </a:lnSpc>
-            </a:pPr>
-            <a:r>
-              <a:rPr lang="en-IN" sz="2000" spc="-50" dirty="0">
-                <a:solidFill>
-                  <a:srgbClr val="2B3541"/>
-                </a:solidFill>
-                <a:latin typeface="Arial" panose="020B0604020202020204" pitchFamily="34" charset="0"/>
-                <a:cs typeface="Arial" panose="020B0604020202020204" pitchFamily="34" charset="0"/>
-              </a:rPr>
-              <a:t>·</a:t>
-            </a:r>
             <a:endParaRPr lang="en-IN" sz="2000" dirty="0">
               <a:latin typeface="Arial" panose="020B0604020202020204" pitchFamily="34" charset="0"/>
               <a:cs typeface="Arial" panose="020B0604020202020204" pitchFamily="34" charset="0"/>
